--- a/assets/pptx/catalog-250.pptx
+++ b/assets/pptx/catalog-250.pptx
@@ -3247,7 +3247,7 @@
                 <a:ea typeface="Ebrima"/>
                 <a:cs typeface="Ebrima"/>
               </a:rPr>
-              <a:t>እንኳን ደስ አለህ (2x)</a:t>
+              <a:t>እንኳን ደስ አለህ 2x</a:t>
             </a:r>
           </a:p>
           <a:p>
@@ -3283,7 +3283,7 @@
                 <a:ea typeface="Ebrima"/>
                 <a:cs typeface="Ebrima"/>
               </a:rPr>
-              <a:t>እንኳን ደስ አለህ (2x)</a:t>
+              <a:t>እንኳን ደስ አለህ 2x</a:t>
             </a:r>
           </a:p>
           <a:p>
@@ -3301,7 +3301,7 @@
                 <a:ea typeface="Ebrima"/>
                 <a:cs typeface="Ebrima"/>
               </a:rPr>
-              <a:t>እንኳን ደስ አለሽ (2x)</a:t>
+              <a:t>እንኳን ደስ አለሽ 2x</a:t>
             </a:r>
           </a:p>
           <a:p>
@@ -3337,7 +3337,7 @@
                 <a:ea typeface="Ebrima"/>
                 <a:cs typeface="Ebrima"/>
               </a:rPr>
-              <a:t>እንኳን ደስ አለሽ (2x)</a:t>
+              <a:t>እንኳን ደስ አለሽ 2x</a:t>
             </a:r>
           </a:p>
           <a:p>
@@ -3355,7 +3355,7 @@
                 <a:ea typeface="Ebrima"/>
                 <a:cs typeface="Ebrima"/>
               </a:rPr>
-              <a:t>እንኳን ደስ አላቹህ (2x)</a:t>
+              <a:t>እንኳን ደስ አላቹህ 2x</a:t>
             </a:r>
           </a:p>
           <a:p>
@@ -3391,7 +3391,7 @@
                 <a:ea typeface="Ebrima"/>
                 <a:cs typeface="Ebrima"/>
               </a:rPr>
-              <a:t>እንኳን ደስ አላቹህ (2x)</a:t>
+              <a:t>እንኳን ደስ አላቹህ 2x</a:t>
             </a:r>
           </a:p>
         </p:txBody>
@@ -3458,7 +3458,7 @@
                 <a:ea typeface="Ebrima"/>
                 <a:cs typeface="Ebrima"/>
               </a:rPr>
-              <a:t>ይመታ ከበሮ (2x) አሳምሮ (2x) ላቆማቸው አብሮ</a:t>
+              <a:t>ይመታ ከበሮ 2x አሳምሮ 2x ላቆማቸው አብሮ</a:t>
             </a:r>
           </a:p>
           <a:p>
@@ -3476,7 +3476,7 @@
                 <a:ea typeface="Ebrima"/>
                 <a:cs typeface="Ebrima"/>
               </a:rPr>
-              <a:t>ይደርደር በገና (2x) እንደገና (2x) ለሆነው ገናና</a:t>
+              <a:t>ይደርደር በገና 2x እንደገና 2x ለሆነው ገናና</a:t>
             </a:r>
           </a:p>
           <a:p>
@@ -3494,7 +3494,7 @@
                 <a:ea typeface="Ebrima"/>
                 <a:cs typeface="Ebrima"/>
               </a:rPr>
-              <a:t>እናመስግን ዛሬ (2x) በዝማሬ (2x) የድል ቀን ነው ዛሬ</a:t>
+              <a:t>እናመስግን ዛሬ 2x በዝማሬ 2x የድል ቀን ነው ዛሬ</a:t>
             </a:r>
           </a:p>
           <a:p>
@@ -3512,7 +3512,7 @@
                 <a:ea typeface="Ebrima"/>
                 <a:cs typeface="Ebrima"/>
               </a:rPr>
-              <a:t>የታለ ዕልልታ (2x) ለዚህ ጌታ (2x) ለጌቶቹ ጌታ</a:t>
+              <a:t>የታለ ዕልልታ 2x ለዚህ ጌታ 2x ለጌቶቹ ጌታ</a:t>
             </a:r>
           </a:p>
         </p:txBody>
@@ -3579,7 +3579,7 @@
                 <a:ea typeface="Ebrima"/>
                 <a:cs typeface="Ebrima"/>
               </a:rPr>
-              <a:t>ጋብቻህ (3x) ለጐረቤት ያብራ አይሁን ለብቻህ ጋብቻህ (2x)</a:t>
+              <a:t>ጋብቻህ 3x ለጐረቤት ያብራ አይሁን ለብቻህ ጋብቻህ 2x</a:t>
             </a:r>
           </a:p>
           <a:p>
@@ -3597,7 +3597,7 @@
                 <a:ea typeface="Ebrima"/>
                 <a:cs typeface="Ebrima"/>
               </a:rPr>
-              <a:t>ጋብቻሽ (3x) ለጨለማው ያብራ አይሁን ለብቻሽ ጋብቻሽ (2x)</a:t>
+              <a:t>ጋብቻሽ 3x ለጨለማው ያብራ አይሁን ለብቻሽ ጋብቻሽ 2x</a:t>
             </a:r>
           </a:p>
         </p:txBody>
@@ -3664,7 +3664,7 @@
                 <a:ea typeface="Ebrima"/>
                 <a:cs typeface="Ebrima"/>
               </a:rPr>
-              <a:t>እንኳን ደስ አለህ (2x)</a:t>
+              <a:t>እንኳን ደስ አለህ 2x</a:t>
             </a:r>
           </a:p>
           <a:p>
@@ -3700,7 +3700,7 @@
                 <a:ea typeface="Ebrima"/>
                 <a:cs typeface="Ebrima"/>
               </a:rPr>
-              <a:t>እንኳን ደስ አለህ (2x)</a:t>
+              <a:t>እንኳን ደስ አለህ 2x</a:t>
             </a:r>
           </a:p>
           <a:p>
@@ -3718,7 +3718,7 @@
                 <a:ea typeface="Ebrima"/>
                 <a:cs typeface="Ebrima"/>
               </a:rPr>
-              <a:t>እንኳን ደስ አለሽ (2x)</a:t>
+              <a:t>እንኳን ደስ አለሽ 2x</a:t>
             </a:r>
           </a:p>
           <a:p>
@@ -3754,7 +3754,7 @@
                 <a:ea typeface="Ebrima"/>
                 <a:cs typeface="Ebrima"/>
               </a:rPr>
-              <a:t>እንኳን ደስ አለሽ (2x)</a:t>
+              <a:t>እንኳን ደስ አለሽ 2x</a:t>
             </a:r>
           </a:p>
           <a:p>
@@ -3772,7 +3772,7 @@
                 <a:ea typeface="Ebrima"/>
                 <a:cs typeface="Ebrima"/>
               </a:rPr>
-              <a:t>እንኳን ደስ አላቹህ (2x)</a:t>
+              <a:t>እንኳን ደስ አላቹህ 2x</a:t>
             </a:r>
           </a:p>
           <a:p>
@@ -3808,7 +3808,7 @@
                 <a:ea typeface="Ebrima"/>
                 <a:cs typeface="Ebrima"/>
               </a:rPr>
-              <a:t>እንኳን ደስ አላቹህ (2x)</a:t>
+              <a:t>እንኳን ደስ አላቹህ 2x</a:t>
             </a:r>
           </a:p>
         </p:txBody>
@@ -3875,7 +3875,7 @@
                 <a:ea typeface="Ebrima"/>
                 <a:cs typeface="Ebrima"/>
               </a:rPr>
-              <a:t>ይመታ ከበሮ (2x) አሳምሮ (2x) ላቆማቸው አብሮ</a:t>
+              <a:t>ይመታ ከበሮ 2x አሳምሮ 2x ላቆማቸው አብሮ</a:t>
             </a:r>
           </a:p>
           <a:p>
@@ -3893,7 +3893,7 @@
                 <a:ea typeface="Ebrima"/>
                 <a:cs typeface="Ebrima"/>
               </a:rPr>
-              <a:t>ይደርደር በገና (2x) እንደገና (2x) ለሆነው ገናና</a:t>
+              <a:t>ይደርደር በገና 2x እንደገና 2x ለሆነው ገናና</a:t>
             </a:r>
           </a:p>
           <a:p>
@@ -3911,7 +3911,7 @@
                 <a:ea typeface="Ebrima"/>
                 <a:cs typeface="Ebrima"/>
               </a:rPr>
-              <a:t>እናመስግን ዛሬ (2x) በዝማሬ (2x) የድል ቀን ነው ዛሬ</a:t>
+              <a:t>እናመስግን ዛሬ 2x በዝማሬ 2x የድል ቀን ነው ዛሬ</a:t>
             </a:r>
           </a:p>
           <a:p>
@@ -3929,7 +3929,7 @@
                 <a:ea typeface="Ebrima"/>
                 <a:cs typeface="Ebrima"/>
               </a:rPr>
-              <a:t>የታለ ዕልልታ (2x) ለዚህ ጌታ (2x) ለጌቶቹ ጌታ</a:t>
+              <a:t>የታለ ዕልልታ 2x ለዚህ ጌታ 2x ለጌቶቹ ጌታ</a:t>
             </a:r>
           </a:p>
         </p:txBody>
@@ -3996,7 +3996,7 @@
                 <a:ea typeface="Ebrima"/>
                 <a:cs typeface="Ebrima"/>
               </a:rPr>
-              <a:t>ጋብቻህ (3x) ለጐረቤት ያብራ አይሁን ለብቻህ ጋብቻህ (2x)</a:t>
+              <a:t>ጋብቻህ 3x ለጐረቤት ያብራ አይሁን ለብቻህ ጋብቻህ 2x</a:t>
             </a:r>
           </a:p>
           <a:p>
@@ -4014,7 +4014,7 @@
                 <a:ea typeface="Ebrima"/>
                 <a:cs typeface="Ebrima"/>
               </a:rPr>
-              <a:t>ጋብቻሽ (3x) ለጨለማው ያብራ አይሁን ለብቻሽ ጋብቻሽ (2x)</a:t>
+              <a:t>ጋብቻሽ 3x ለጨለማው ያብራ አይሁን ለብቻሽ ጋብቻሽ 2x</a:t>
             </a:r>
           </a:p>
         </p:txBody>
@@ -4081,7 +4081,7 @@
                 <a:ea typeface="Ebrima"/>
                 <a:cs typeface="Ebrima"/>
               </a:rPr>
-              <a:t>እንኳን ደስ አለህ (2x)</a:t>
+              <a:t>እንኳን ደስ አለህ 2x</a:t>
             </a:r>
           </a:p>
           <a:p>
@@ -4117,7 +4117,7 @@
                 <a:ea typeface="Ebrima"/>
                 <a:cs typeface="Ebrima"/>
               </a:rPr>
-              <a:t>እንኳን ደስ አለህ (2x)</a:t>
+              <a:t>እንኳን ደስ አለህ 2x</a:t>
             </a:r>
           </a:p>
           <a:p>
@@ -4135,7 +4135,7 @@
                 <a:ea typeface="Ebrima"/>
                 <a:cs typeface="Ebrima"/>
               </a:rPr>
-              <a:t>እንኳን ደስ አለሽ (2x)</a:t>
+              <a:t>እንኳን ደስ አለሽ 2x</a:t>
             </a:r>
           </a:p>
           <a:p>
@@ -4171,7 +4171,7 @@
                 <a:ea typeface="Ebrima"/>
                 <a:cs typeface="Ebrima"/>
               </a:rPr>
-              <a:t>እንኳን ደስ አለሽ (2x)</a:t>
+              <a:t>እንኳን ደስ አለሽ 2x</a:t>
             </a:r>
           </a:p>
           <a:p>
@@ -4189,7 +4189,7 @@
                 <a:ea typeface="Ebrima"/>
                 <a:cs typeface="Ebrima"/>
               </a:rPr>
-              <a:t>እንኳን ደስ አላቹህ (2x)</a:t>
+              <a:t>እንኳን ደስ አላቹህ 2x</a:t>
             </a:r>
           </a:p>
           <a:p>
@@ -4225,7 +4225,7 @@
                 <a:ea typeface="Ebrima"/>
                 <a:cs typeface="Ebrima"/>
               </a:rPr>
-              <a:t>እንኳን ደስ አላቹህ (2x)</a:t>
+              <a:t>እንኳን ደስ አላቹህ 2x</a:t>
             </a:r>
           </a:p>
         </p:txBody>
